--- a/presentasi/klaster1/BHP Medan - Klaster 1 Tumpang Tindih Kewenangan - Paparan.pptx
+++ b/presentasi/klaster1/BHP Medan - Klaster 1 Tumpang Tindih Kewenangan - Paparan.pptx
@@ -1557,7 +1557,7 @@
                   <a:srgbClr val="2B2B2B"/>
                 </a:solidFill>
               </a:rPr>
-              <a:t>Kendalanya muncul saat kurator BHP bekerja bersama kurator perseorangan: belum ada pembagian imbalan dan tanggung jawab, serah terima saat PKPU berakhir pailit, dan satu standar profesi.</a:t>
+              <a:t>Yang </a:t>
             </a:r>
             <a:r>
               <a:rPr lang="en-US" sz="1100" dirty="0" err="1">
@@ -1565,7 +1565,7 @@
                   <a:srgbClr val="2B2B2B"/>
                 </a:solidFill>
               </a:rPr>
-              <a:t/>
+              <a:t>menjadi</a:t>
             </a:r>
             <a:r>
               <a:rPr lang="en-US" sz="1100" dirty="0">
@@ -1573,7 +1573,7 @@
                   <a:srgbClr val="2B2B2B"/>
                 </a:solidFill>
               </a:rPr>
-              <a:t/>
+              <a:t> </a:t>
             </a:r>
             <a:r>
               <a:rPr lang="en-US" sz="1100" dirty="0" err="1">
@@ -1581,7 +1581,7 @@
                   <a:srgbClr val="2B2B2B"/>
                 </a:solidFill>
               </a:rPr>
-              <a:t/>
+              <a:t>kendala</a:t>
             </a:r>
             <a:r>
               <a:rPr lang="en-US" sz="1100" dirty="0">
@@ -1589,7 +1589,7 @@
                   <a:srgbClr val="2B2B2B"/>
                 </a:solidFill>
               </a:rPr>
-              <a:t/>
+              <a:t> </a:t>
             </a:r>
             <a:r>
               <a:rPr lang="en-US" sz="1100" dirty="0" err="1">
@@ -1597,7 +1597,7 @@
                   <a:srgbClr val="2B2B2B"/>
                 </a:solidFill>
               </a:rPr>
-              <a:t/>
+              <a:t>adalah</a:t>
             </a:r>
             <a:r>
               <a:rPr lang="en-US" sz="1100" dirty="0">
@@ -1605,7 +1605,7 @@
                   <a:srgbClr val="2B2B2B"/>
                 </a:solidFill>
               </a:rPr>
-              <a:t/>
+              <a:t> </a:t>
             </a:r>
             <a:r>
               <a:rPr lang="en-US" sz="1100" dirty="0" err="1">
@@ -1613,7 +1613,7 @@
                   <a:srgbClr val="2B2B2B"/>
                 </a:solidFill>
               </a:rPr>
-              <a:t/>
+              <a:t>ketika</a:t>
             </a:r>
             <a:r>
               <a:rPr lang="en-US" sz="1100" dirty="0">
@@ -1621,7 +1621,7 @@
                   <a:srgbClr val="2B2B2B"/>
                 </a:solidFill>
               </a:rPr>
-              <a:t/>
+              <a:t> </a:t>
             </a:r>
             <a:r>
               <a:rPr lang="en-US" sz="1100" dirty="0" err="1">
@@ -1629,7 +1629,7 @@
                   <a:srgbClr val="2B2B2B"/>
                 </a:solidFill>
               </a:rPr>
-              <a:t/>
+              <a:t>kurator</a:t>
             </a:r>
             <a:r>
               <a:rPr lang="en-US" sz="1100" dirty="0">
@@ -1637,7 +1637,7 @@
                   <a:srgbClr val="2B2B2B"/>
                 </a:solidFill>
               </a:rPr>
-              <a:t/>
+              <a:t> BHP </a:t>
             </a:r>
             <a:r>
               <a:rPr lang="en-US" sz="1100" dirty="0" err="1">
@@ -1645,7 +1645,7 @@
                   <a:srgbClr val="2B2B2B"/>
                 </a:solidFill>
               </a:rPr>
-              <a:t/>
+              <a:t>bekerja</a:t>
             </a:r>
             <a:r>
               <a:rPr lang="en-US" sz="1100" dirty="0">
@@ -1653,7 +1653,7 @@
                   <a:srgbClr val="2B2B2B"/>
                 </a:solidFill>
               </a:rPr>
-              <a:t/>
+              <a:t> </a:t>
             </a:r>
             <a:r>
               <a:rPr lang="en-US" sz="1100" dirty="0" err="1">
@@ -1661,7 +1661,7 @@
                   <a:srgbClr val="2B2B2B"/>
                 </a:solidFill>
               </a:rPr>
-              <a:t/>
+              <a:t>sama</a:t>
             </a:r>
             <a:r>
               <a:rPr lang="en-US" sz="1100" dirty="0">
@@ -1669,7 +1669,7 @@
                   <a:srgbClr val="2B2B2B"/>
                 </a:solidFill>
               </a:rPr>
-              <a:t/>
+              <a:t> </a:t>
             </a:r>
             <a:r>
               <a:rPr lang="en-US" sz="1100" dirty="0" err="1">
@@ -1677,7 +1677,7 @@
                   <a:srgbClr val="2B2B2B"/>
                 </a:solidFill>
               </a:rPr>
-              <a:t/>
+              <a:t>dengan</a:t>
             </a:r>
             <a:r>
               <a:rPr lang="en-US" sz="1100" dirty="0">
@@ -1685,7 +1685,7 @@
                   <a:srgbClr val="2B2B2B"/>
                 </a:solidFill>
               </a:rPr>
-              <a:t/>
+              <a:t> </a:t>
             </a:r>
             <a:r>
               <a:rPr lang="en-US" sz="1100" dirty="0" err="1">
@@ -1693,7 +1693,7 @@
                   <a:srgbClr val="2B2B2B"/>
                 </a:solidFill>
               </a:rPr>
-              <a:t/>
+              <a:t>kurator</a:t>
             </a:r>
             <a:r>
               <a:rPr lang="en-US" sz="1100" dirty="0">
@@ -1701,7 +1701,7 @@
                   <a:srgbClr val="2B2B2B"/>
                 </a:solidFill>
               </a:rPr>
-              <a:t/>
+              <a:t> </a:t>
             </a:r>
             <a:r>
               <a:rPr lang="en-US" sz="1100" dirty="0" err="1">
@@ -1709,7 +1709,7 @@
                   <a:srgbClr val="2B2B2B"/>
                 </a:solidFill>
               </a:rPr>
-              <a:t/>
+              <a:t>perseorangan</a:t>
             </a:r>
             <a:r>
               <a:rPr lang="en-US" sz="1100" dirty="0">
@@ -1717,8 +1717,105 @@
                   <a:srgbClr val="2B2B2B"/>
                 </a:solidFill>
               </a:rPr>
-              <a:t/>
-            </a:r>
+              <a:t>.</a:t>
+            </a:r>
+          </a:p>
+          <a:p>
+            <a:pPr marL="0" indent="0">
+              <a:spcAft>
+                <a:spcPts val="250"/>
+              </a:spcAft>
+              <a:buNone/>
+            </a:pPr>
+            <a:r>
+              <a:rPr lang="en-US" sz="1100" dirty="0">
+                <a:solidFill>
+                  <a:srgbClr val="2B2B2B"/>
+                </a:solidFill>
+              </a:rPr>
+              <a:t>Belum </a:t>
+            </a:r>
+            <a:r>
+              <a:rPr lang="en-US" sz="1100" dirty="0" err="1">
+                <a:solidFill>
+                  <a:srgbClr val="2B2B2B"/>
+                </a:solidFill>
+              </a:rPr>
+              <a:t>ada</a:t>
+            </a:r>
+            <a:r>
+              <a:rPr lang="en-US" sz="1100" dirty="0">
+                <a:solidFill>
+                  <a:srgbClr val="2B2B2B"/>
+                </a:solidFill>
+              </a:rPr>
+              <a:t> </a:t>
+            </a:r>
+            <a:r>
+              <a:rPr lang="en-US" sz="1100" dirty="0" err="1">
+                <a:solidFill>
+                  <a:srgbClr val="2B2B2B"/>
+                </a:solidFill>
+              </a:rPr>
+              <a:t>pembagian</a:t>
+            </a:r>
+            <a:r>
+              <a:rPr lang="en-US" sz="1100" dirty="0">
+                <a:solidFill>
+                  <a:srgbClr val="2B2B2B"/>
+                </a:solidFill>
+              </a:rPr>
+              <a:t> imbalan dan </a:t>
+            </a:r>
+            <a:r>
+              <a:rPr lang="en-US" sz="1100" dirty="0" err="1">
+                <a:solidFill>
+                  <a:srgbClr val="2B2B2B"/>
+                </a:solidFill>
+              </a:rPr>
+              <a:t>tanggung</a:t>
+            </a:r>
+            <a:r>
+              <a:rPr lang="en-US" sz="1100" dirty="0">
+                <a:solidFill>
+                  <a:srgbClr val="2B2B2B"/>
+                </a:solidFill>
+              </a:rPr>
+              <a:t> </a:t>
+            </a:r>
+            <a:r>
+              <a:rPr lang="en-US" sz="1100" dirty="0" err="1">
+                <a:solidFill>
+                  <a:srgbClr val="2B2B2B"/>
+                </a:solidFill>
+              </a:rPr>
+              <a:t>jawab</a:t>
+            </a:r>
+            <a:r>
+              <a:rPr lang="en-US" sz="1100" dirty="0">
+                <a:solidFill>
+                  <a:srgbClr val="2B2B2B"/>
+                </a:solidFill>
+              </a:rPr>
+              <a:t> yang </a:t>
+            </a:r>
+            <a:r>
+              <a:rPr lang="en-US" sz="1100" dirty="0" err="1">
+                <a:solidFill>
+                  <a:srgbClr val="2B2B2B"/>
+                </a:solidFill>
+              </a:rPr>
+              <a:t>jelas</a:t>
+            </a:r>
+            <a:r>
+              <a:rPr lang="en-US" sz="1100" dirty="0">
+                <a:solidFill>
+                  <a:srgbClr val="2B2B2B"/>
+                </a:solidFill>
+              </a:rPr>
+              <a:t>, serah terima dari PKPU, dan standar profesi yang sama.</a:t>
+            </a:r>
+            <a:endParaRPr lang="en-US" sz="1100" dirty="0"/>
           </a:p>
         </p:txBody>
       </p:sp>
@@ -7601,7 +7698,7 @@
                   <a:srgbClr val="2B2B2B"/>
                 </a:solidFill>
               </a:rPr>
-              <a:t>Satu standar profesi bagi BHP dan kurator perseorangan; kode etik mengikuti jalur masing-masing (ASN untuk BHP, organisasi profesi untuk kurator perseorangan).</a:t>
+              <a:t>Satu standar profesi dan kode etik bagi BHP dan kurator perseorangan.</a:t>
             </a:r>
             <a:endParaRPr lang="en-US" sz="1200" dirty="0"/>
           </a:p>

--- a/presentasi/klaster1/BHP Medan - Klaster 1 Tumpang Tindih Kewenangan - Paparan.pptx
+++ b/presentasi/klaster1/BHP Medan - Klaster 1 Tumpang Tindih Kewenangan - Paparan.pptx
@@ -915,7 +915,7 @@
           <a:spcPct val="20000"/>
         </a:spcBef>
         <a:buFont typeface="Arial" pitchFamily="34" charset="0"/>
-        <a:buChar char="–"/>
+        <a:buChar char="•"/>
         <a:defRPr sz="2800" kern="1200">
           <a:solidFill>
             <a:schemeClr val="tx1"/>
@@ -945,7 +945,7 @@
           <a:spcPct val="20000"/>
         </a:spcBef>
         <a:buFont typeface="Arial" pitchFamily="34" charset="0"/>
-        <a:buChar char="–"/>
+        <a:buChar char="•"/>
         <a:defRPr sz="2000" kern="1200">
           <a:solidFill>
             <a:schemeClr val="tx1"/>

--- a/presentasi/klaster1/BHP Medan - Klaster 1 Tumpang Tindih Kewenangan - Paparan.pptx
+++ b/presentasi/klaster1/BHP Medan - Klaster 1 Tumpang Tindih Kewenangan - Paparan.pptx
@@ -2895,7 +2895,7 @@
                   <a:srgbClr val="2B2B2B"/>
                 </a:solidFill>
               </a:rPr>
-              <a:t>SIPP 2025 s.d. 2026: dari 16 putusan pailit, BHP hanya diangkat 2 kali, keduanya karena diminta pemohon. Penugasan BHP masih bergantung pada pilihan pemohon.</a:t>
+              <a:t>SIPP 2025 s.d. 2026: dari 16 putusan pailit, BHP hanya ditunjuk 1 kali, atas permintaan pemohon; 1 perkara lain dalam kasasi. Penugasan BHP masih bergantung pada pemohon.</a:t>
             </a:r>
             <a:endParaRPr lang="en-US" sz="1050" dirty="0"/>
           </a:p>
@@ -3243,7 +3243,7 @@
                 <a:ea typeface="Cambria" pitchFamily="34" charset="-122"/>
                 <a:cs typeface="Cambria" pitchFamily="34" charset="-120"/>
               </a:rPr>
-              <a:t>2 dari 9</a:t>
+              <a:t>1 dari 9</a:t>
             </a:r>
             <a:endParaRPr lang="en-US" sz="2200" dirty="0"/>
           </a:p>
@@ -3279,7 +3279,7 @@
                   <a:srgbClr val="FFFFFF"/>
                 </a:solidFill>
               </a:rPr>
-              <a:t>putusan pailit 2025 mengangkat BHP</a:t>
+              <a:t>putusan pailit 2025 menunjuk BHP</a:t>
             </a:r>
             <a:endParaRPr lang="en-US" sz="1150" dirty="0"/>
           </a:p>
@@ -3354,7 +3354,7 @@
                   <a:srgbClr val="FFFFFF"/>
                 </a:solidFill>
               </a:rPr>
-              <a:t>putusan pailit 2026 mengangkat BHP</a:t>
+              <a:t>putusan pailit 2026 menunjuk BHP</a:t>
             </a:r>
             <a:endParaRPr lang="en-US" sz="1150" dirty="0"/>
           </a:p>
@@ -7422,7 +7422,7 @@
                   <a:srgbClr val="2B2B2B"/>
                 </a:solidFill>
               </a:rPr>
-              <a:t>Pengadilan wajib mengangkat BHP bila debitor meninggal tanpa ahli waris atau hartanya tak terurus, tidak diketahui keberadaannya, ahli waris masih anak atau dalam pengampuan, permohonan diajukan pekerja, atau perkara kehilangan kurator.</a:t>
+              <a:t>Pengadilan wajib menunjuk BHP bila debitor meninggal tanpa ahli waris atau hartanya tak terurus, tidak diketahui keberadaannya, ahli waris masih anak atau dalam pengampuan, permohonan diajukan pekerja, atau perkara kehilangan kurator.</a:t>
             </a:r>
             <a:endParaRPr lang="en-US" sz="1200" dirty="0"/>
           </a:p>
@@ -8534,7 +8534,7 @@
                   <a:srgbClr val="F1DCDF"/>
                 </a:solidFill>
               </a:rPr>
-              <a:t>mengangkat kurator dan menyampaikan putusan</a:t>
+              <a:t>menunjuk kurator dan menyampaikan putusan</a:t>
             </a:r>
             <a:endParaRPr lang="en-US" sz="1050" dirty="0"/>
           </a:p>

--- a/presentasi/klaster1/BHP Medan - Klaster 1 Tumpang Tindih Kewenangan - Paparan.pptx
+++ b/presentasi/klaster1/BHP Medan - Klaster 1 Tumpang Tindih Kewenangan - Paparan.pptx
@@ -2895,7 +2895,7 @@
                   <a:srgbClr val="2B2B2B"/>
                 </a:solidFill>
               </a:rPr>
-              <a:t>SIPP 2025 s.d. 2026: dari 16 putusan pailit, BHP hanya ditunjuk 1 kali, atas permintaan pemohon; 1 perkara lain dalam kasasi. Penugasan BHP masih bergantung pada pemohon.</a:t>
+              <a:t>SIPP 2025 s.d. 2026: dari 109 permohonan pailit dan PKPU, 16 berakhir putusan pailit; BHP hanya ditunjuk 1 kali, atas permintaan pemohon; 1 perkara lain dalam kasasi. Penugasan BHP masih bergantung pada pemohon.</a:t>
             </a:r>
             <a:endParaRPr lang="en-US" sz="1050" dirty="0"/>
           </a:p>
@@ -3390,7 +3390,7 @@
                   <a:srgbClr val="6B6B6B"/>
                 </a:solidFill>
               </a:rPr>
-              <a:t>Sumber: Buku Register Kepailitan dan laporan pengurusan BHP Medan; SIPP PN Medan per 2 Oktober 2026, diolah.</a:t>
+              <a:t>Sumber: Buku Register Kepailitan dan laporan pengurusan BHP Medan; SIPP PN Medan per 2 Oktober 2026, diolah. Dihitung per putusan pailit, bukan per permohonan.</a:t>
             </a:r>
             <a:endParaRPr lang="en-US" sz="900" dirty="0"/>
           </a:p>

--- a/presentasi/klaster1/BHP Medan - Klaster 1 Tumpang Tindih Kewenangan - Paparan.pptx
+++ b/presentasi/klaster1/BHP Medan - Klaster 1 Tumpang Tindih Kewenangan - Paparan.pptx
@@ -2895,7 +2895,7 @@
                   <a:srgbClr val="2B2B2B"/>
                 </a:solidFill>
               </a:rPr>
-              <a:t>SIPP 2025 s.d. 2026: dari 109 permohonan pailit dan PKPU, 16 berakhir putusan pailit; BHP hanya ditunjuk 1 kali, atas permintaan pemohon; 1 perkara lain dalam kasasi. Penugasan BHP masih bergantung pada pemohon.</a:t>
+              <a:t>SIPP 2025 s.d. 2026: dari 16 putusan pailit, BHP hanya ditunjuk 1 kali, atas permintaan pemohon; 1 perkara lain dalam kasasi. Penugasan BHP masih bergantung pada pemohon.</a:t>
             </a:r>
             <a:endParaRPr lang="en-US" sz="1050" dirty="0"/>
           </a:p>
